--- a/data/outputs/v2/Grade11/Biology/Quizzes/SS2.2_Growth_and_Development_in_Plants/Biology_G11_SS2.2_Growth_and_Development_in_Plants_L3_QuickCheck.pptx
+++ b/data/outputs/v2/Grade11/Biology/Quizzes/SS2.2_Growth_and_Development_in_Plants/Biology_G11_SS2.2_Growth_and_Development_in_Plants_L3_QuickCheck.pptx
@@ -14,9 +14,10 @@
     <p:sldId id="262" r:id="rId8"/>
     <p:sldId id="263" r:id="rId9"/>
     <p:sldId id="264" r:id="rId10"/>
+    <p:sldId id="265" r:id="rId11"/>
   </p:sldIdLst>
   <p:notesMasterIdLst>
-    <p:notesMasterId r:id="rId11"/>
+    <p:notesMasterId r:id="rId12"/>
   </p:notesMasterIdLst>
   <p:sldSz cx="12192000" cy="6858000"/>
   <p:notesSz cx="6858000" cy="12192000"/>
@@ -534,6 +535,94 @@
             <a:fld id="{F7021451-1387-4CA6-816F-3879F97B5CBC}" type="slidenum">
               <a:rPr lang="en-US"/>
               <a:t>1</a:t>
+            </a:fld>
+            <a:endParaRPr lang="en-US"/>
+          </a:p>
+        </p:txBody>
+      </p:sp>
+    </p:spTree>
+    <p:extLst>
+      <p:ext uri="{BB962C8B-B14F-4D97-AF65-F5344CB8AC3E}">
+        <p14:creationId xmlns:p14="http://schemas.microsoft.com/office/powerpoint/2010/main" val="1024086991"/>
+      </p:ext>
+    </p:extLst>
+  </p:cSld>
+  <p:clrMapOvr>
+    <a:masterClrMapping/>
+  </p:clrMapOvr>
+</p:notes>
+</file>
+
+<file path=ppt/notesSlides/notesSlide10.xml><?xml version="1.0" encoding="utf-8"?>
+<p:notes xmlns:a="http://schemas.openxmlformats.org/drawingml/2006/main" xmlns:r="http://schemas.openxmlformats.org/officeDocument/2006/relationships" xmlns:p="http://schemas.openxmlformats.org/presentationml/2006/main">
+  <p:cSld>
+    <p:spTree>
+      <p:nvGrpSpPr>
+        <p:cNvPr id="1" name=""/>
+        <p:cNvGrpSpPr/>
+        <p:nvPr/>
+      </p:nvGrpSpPr>
+      <p:grpSpPr>
+        <a:xfrm>
+          <a:off x="0" y="0"/>
+          <a:ext cx="0" cy="0"/>
+          <a:chOff x="0" y="0"/>
+          <a:chExt cx="0" cy="0"/>
+        </a:xfrm>
+      </p:grpSpPr>
+      <p:sp>
+        <p:nvSpPr>
+          <p:cNvPr id="2" name="Slide Image Placeholder 1"/>
+          <p:cNvSpPr>
+            <a:spLocks noGrp="1" noRot="1" noChangeAspect="1"/>
+          </p:cNvSpPr>
+          <p:nvPr>
+            <p:ph type="sldImg"/>
+          </p:nvPr>
+        </p:nvSpPr>
+        <p:spPr/>
+      </p:sp>
+      <p:sp>
+        <p:nvSpPr>
+          <p:cNvPr id="3" name="Notes Placeholder 2"/>
+          <p:cNvSpPr>
+            <a:spLocks noGrp="1"/>
+          </p:cNvSpPr>
+          <p:nvPr>
+            <p:ph type="body" idx="1"/>
+          </p:nvPr>
+        </p:nvSpPr>
+        <p:spPr/>
+        <p:txBody>
+          <a:bodyPr/>
+          <a:lstStyle/>
+          <a:p>
+            <a:r>
+              <a:rPr lang="en-US" dirty="0"/>
+              <a:t/>
+            </a:r>
+            <a:endParaRPr lang="en-US" dirty="0"/>
+          </a:p>
+        </p:txBody>
+      </p:sp>
+      <p:sp>
+        <p:nvSpPr>
+          <p:cNvPr id="4" name="Slide Number Placeholder 3"/>
+          <p:cNvSpPr>
+            <a:spLocks noGrp="1"/>
+          </p:cNvSpPr>
+          <p:nvPr>
+            <p:ph type="sldNum" sz="quarter" idx="10"/>
+          </p:nvPr>
+        </p:nvSpPr>
+        <p:spPr/>
+        <p:txBody>
+          <a:bodyPr/>
+          <a:lstStyle/>
+          <a:p>
+            <a:fld id="{F7021451-1387-4CA6-816F-3879F97B5CBC}" type="slidenum">
+              <a:rPr lang="en-US"/>
+              <a:t>10</a:t>
             </a:fld>
             <a:endParaRPr lang="en-US"/>
           </a:p>
@@ -1698,7 +1787,7 @@
                 <a:ea typeface="Arial" pitchFamily="34" charset="-122"/>
                 <a:cs typeface="Arial" pitchFamily="34" charset="-120"/>
               </a:rPr>
-              <a:t>Lesson 3: Seed Dormancy: Why Do Some Healthy-Looking Seeds Refuse to Germinate?</a:t>
+              <a:t>Lesson 3: Seed Dormancy: Why Do Healthy-Looking Seeds Not Germinate?</a:t>
             </a:r>
             <a:endParaRPr lang="en-US" sz="2000" dirty="0"/>
           </a:p>
@@ -1737,7 +1826,7 @@
                 <a:ea typeface="Arial" pitchFamily="34" charset="-122"/>
                 <a:cs typeface="Arial" pitchFamily="34" charset="-120"/>
               </a:rPr>
-              <a:t>7 multiple-choice questions  •  choose A, B, C or D</a:t>
+              <a:t>8 multiple-choice questions  •  choose A, B, C or D</a:t>
             </a:r>
             <a:endParaRPr lang="en-US" sz="1600" dirty="0"/>
           </a:p>
@@ -1853,6 +1942,116 @@
               <a:t> (https://creativecommons.org/licenses/by-nc/4.0/).</a:t>
             </a:r>
             <a:endParaRPr lang="en-US" sz="900" dirty="0"/>
+          </a:p>
+        </p:txBody>
+      </p:sp>
+    </p:spTree>
+  </p:cSld>
+  <p:clrMapOvr>
+    <a:masterClrMapping/>
+  </p:clrMapOvr>
+</p:sld>
+</file>
+
+<file path=ppt/slides/slide10.xml><?xml version="1.0" encoding="utf-8"?>
+<p:sld xmlns:a="http://schemas.openxmlformats.org/drawingml/2006/main" xmlns:r="http://schemas.openxmlformats.org/officeDocument/2006/relationships" xmlns:p="http://schemas.openxmlformats.org/presentationml/2006/main">
+  <p:cSld name="Slide 10">
+    <p:bg>
+      <p:bgPr>
+        <a:solidFill>
+          <a:srgbClr val="1F3864"/>
+        </a:solidFill>
+      </p:bgPr>
+    </p:bg>
+    <p:spTree>
+      <p:nvGrpSpPr>
+        <p:cNvPr id="1" name=""/>
+        <p:cNvGrpSpPr/>
+        <p:nvPr/>
+      </p:nvGrpSpPr>
+      <p:grpSpPr>
+        <a:xfrm>
+          <a:off x="0" y="0"/>
+          <a:ext cx="0" cy="0"/>
+          <a:chOff x="0" y="0"/>
+          <a:chExt cx="0" cy="0"/>
+        </a:xfrm>
+      </p:grpSpPr>
+      <p:sp>
+        <p:nvSpPr>
+          <p:cNvPr id="2" name="Text 0"/>
+          <p:cNvSpPr/>
+          <p:nvPr/>
+        </p:nvSpPr>
+        <p:spPr>
+          <a:xfrm>
+            <a:off x="731520" y="2194560"/>
+            <a:ext cx="10698480" cy="822960"/>
+          </a:xfrm>
+          <a:prstGeom prst="rect">
+            <a:avLst/>
+          </a:prstGeom>
+          <a:noFill/>
+          <a:ln/>
+        </p:spPr>
+        <p:txBody>
+          <a:bodyPr wrap="square" lIns="0" tIns="0" rIns="0" bIns="0" rtlCol="0" anchor="ctr"/>
+          <a:lstStyle/>
+          <a:p>
+            <a:pPr indent="0" marL="0">
+              <a:buNone/>
+            </a:pPr>
+            <a:r>
+              <a:rPr lang="en-US" sz="3400" b="1" dirty="0">
+                <a:solidFill>
+                  <a:srgbClr val="FFFFFF"/>
+                </a:solidFill>
+                <a:latin typeface="Arial" pitchFamily="34" charset="0"/>
+                <a:ea typeface="Arial" pitchFamily="34" charset="-122"/>
+                <a:cs typeface="Arial" pitchFamily="34" charset="-120"/>
+              </a:rPr>
+              <a:t>All done</a:t>
+            </a:r>
+            <a:endParaRPr lang="en-US" sz="3400" dirty="0"/>
+          </a:p>
+        </p:txBody>
+      </p:sp>
+      <p:sp>
+        <p:nvSpPr>
+          <p:cNvPr id="3" name="Text 1"/>
+          <p:cNvSpPr/>
+          <p:nvPr/>
+        </p:nvSpPr>
+        <p:spPr>
+          <a:xfrm>
+            <a:off x="731520" y="3108960"/>
+            <a:ext cx="10698480" cy="731520"/>
+          </a:xfrm>
+          <a:prstGeom prst="rect">
+            <a:avLst/>
+          </a:prstGeom>
+          <a:noFill/>
+          <a:ln/>
+        </p:spPr>
+        <p:txBody>
+          <a:bodyPr wrap="square" lIns="0" tIns="0" rIns="0" bIns="0" rtlCol="0" anchor="ctr"/>
+          <a:lstStyle/>
+          <a:p>
+            <a:pPr indent="0" marL="0">
+              <a:buNone/>
+            </a:pPr>
+            <a:r>
+              <a:rPr lang="en-US" sz="1800" dirty="0">
+                <a:solidFill>
+                  <a:srgbClr val="D9EEF1"/>
+                </a:solidFill>
+                <a:latin typeface="Arial" pitchFamily="34" charset="0"/>
+                <a:ea typeface="Arial" pitchFamily="34" charset="-122"/>
+                <a:cs typeface="Arial" pitchFamily="34" charset="-120"/>
+              </a:rPr>
+              <a:t>Ask your teacher how to submit your answers today (for example, on a paper answer slip).</a:t>
+            </a:r>
+            <a:endParaRPr lang="en-US" sz="1800" dirty="0"/>
           </a:p>
         </p:txBody>
       </p:sp>
@@ -1921,7 +2120,7 @@
                 <a:ea typeface="Arial" pitchFamily="34" charset="-122"/>
                 <a:cs typeface="Arial" pitchFamily="34" charset="-120"/>
               </a:rPr>
-              <a:t>QUESTION 1 OF 7</a:t>
+              <a:t>QUESTION 1 OF 8</a:t>
             </a:r>
             <a:endParaRPr lang="en-US" sz="1300" dirty="0"/>
           </a:p>
@@ -2021,7 +2220,7 @@
                 <a:ea typeface="Arial" pitchFamily="34" charset="-122"/>
                 <a:cs typeface="Arial" pitchFamily="34" charset="-120"/>
               </a:rPr>
-              <a:t>In Trans Nzoia, a farmer plants maize and beans on the same day after rain. Some healthy-looking seeds never germinate. Which statement best describes seed dormancy?</a:t>
+              <a:t>Mr. Wafula planted Rosecoco beans and some healthy-looking seeds did not germinate even though the rain, soil and planting day were the same. Which statement best describes a dormant seed?</a:t>
             </a:r>
             <a:endParaRPr lang="en-US" sz="2000" dirty="0"/>
           </a:p>
@@ -2113,17 +2312,17 @@
               <a:buNone/>
             </a:pPr>
             <a:r>
-              <a:rPr lang="en-US" sz="1500" dirty="0">
-                <a:solidFill>
-                  <a:srgbClr val="FFFFFF"/>
-                </a:solidFill>
-                <a:latin typeface="Arial" pitchFamily="34" charset="0"/>
-                <a:ea typeface="Arial" pitchFamily="34" charset="-122"/>
-                <a:cs typeface="Arial" pitchFamily="34" charset="-120"/>
-              </a:rPr>
-              <a:t>A state in which the seed has died and cannot grow again</a:t>
-            </a:r>
-            <a:endParaRPr lang="en-US" sz="1500" dirty="0"/>
+              <a:rPr lang="en-US" sz="1700" dirty="0">
+                <a:solidFill>
+                  <a:srgbClr val="FFFFFF"/>
+                </a:solidFill>
+                <a:latin typeface="Arial" pitchFamily="34" charset="0"/>
+                <a:ea typeface="Arial" pitchFamily="34" charset="-122"/>
+                <a:cs typeface="Arial" pitchFamily="34" charset="-120"/>
+              </a:rPr>
+              <a:t>A living seed that fails to germinate even when conditions are favourable</a:t>
+            </a:r>
+            <a:endParaRPr lang="en-US" sz="1700" dirty="0"/>
           </a:p>
         </p:txBody>
       </p:sp>
@@ -2213,17 +2412,17 @@
               <a:buNone/>
             </a:pPr>
             <a:r>
-              <a:rPr lang="en-US" sz="1500" dirty="0">
-                <a:solidFill>
-                  <a:srgbClr val="FFFFFF"/>
-                </a:solidFill>
-                <a:latin typeface="Arial" pitchFamily="34" charset="0"/>
-                <a:ea typeface="Arial" pitchFamily="34" charset="-122"/>
-                <a:cs typeface="Arial" pitchFamily="34" charset="-120"/>
-              </a:rPr>
-              <a:t>A state in which the seed has no embryo inside it</a:t>
-            </a:r>
-            <a:endParaRPr lang="en-US" sz="1500" dirty="0"/>
+              <a:rPr lang="en-US" sz="1700" dirty="0">
+                <a:solidFill>
+                  <a:srgbClr val="FFFFFF"/>
+                </a:solidFill>
+                <a:latin typeface="Arial" pitchFamily="34" charset="0"/>
+                <a:ea typeface="Arial" pitchFamily="34" charset="-122"/>
+                <a:cs typeface="Arial" pitchFamily="34" charset="-120"/>
+              </a:rPr>
+              <a:t>A seed that has been eaten by pests in the soil</a:t>
+            </a:r>
+            <a:endParaRPr lang="en-US" sz="1700" dirty="0"/>
           </a:p>
         </p:txBody>
       </p:sp>
@@ -2313,17 +2512,17 @@
               <a:buNone/>
             </a:pPr>
             <a:r>
-              <a:rPr lang="en-US" sz="1500" dirty="0">
-                <a:solidFill>
-                  <a:srgbClr val="FFFFFF"/>
-                </a:solidFill>
-                <a:latin typeface="Arial" pitchFamily="34" charset="0"/>
-                <a:ea typeface="Arial" pitchFamily="34" charset="-122"/>
-                <a:cs typeface="Arial" pitchFamily="34" charset="-120"/>
-              </a:rPr>
-              <a:t>A resting state in which a living seed does not germinate even when conditions look right</a:t>
-            </a:r>
-            <a:endParaRPr lang="en-US" sz="1500" dirty="0"/>
+              <a:rPr lang="en-US" sz="1700" dirty="0">
+                <a:solidFill>
+                  <a:srgbClr val="FFFFFF"/>
+                </a:solidFill>
+                <a:latin typeface="Arial" pitchFamily="34" charset="0"/>
+                <a:ea typeface="Arial" pitchFamily="34" charset="-122"/>
+                <a:cs typeface="Arial" pitchFamily="34" charset="-120"/>
+              </a:rPr>
+              <a:t>A dead seed whose embryo has rotted</a:t>
+            </a:r>
+            <a:endParaRPr lang="en-US" sz="1700" dirty="0"/>
           </a:p>
         </p:txBody>
       </p:sp>
@@ -2413,17 +2612,17 @@
               <a:buNone/>
             </a:pPr>
             <a:r>
-              <a:rPr lang="en-US" sz="1500" dirty="0">
-                <a:solidFill>
-                  <a:srgbClr val="FFFFFF"/>
-                </a:solidFill>
-                <a:latin typeface="Arial" pitchFamily="34" charset="0"/>
-                <a:ea typeface="Arial" pitchFamily="34" charset="-122"/>
-                <a:cs typeface="Arial" pitchFamily="34" charset="-120"/>
-              </a:rPr>
-              <a:t>A state in which every seed germinates immediately when watered</a:t>
-            </a:r>
-            <a:endParaRPr lang="en-US" sz="1500" dirty="0"/>
+              <a:rPr lang="en-US" sz="1700" dirty="0">
+                <a:solidFill>
+                  <a:srgbClr val="FFFFFF"/>
+                </a:solidFill>
+                <a:latin typeface="Arial" pitchFamily="34" charset="0"/>
+                <a:ea typeface="Arial" pitchFamily="34" charset="-122"/>
+                <a:cs typeface="Arial" pitchFamily="34" charset="-120"/>
+              </a:rPr>
+              <a:t>A seed that fails because it was planted in waterlogged soil</a:t>
+            </a:r>
+            <a:endParaRPr lang="en-US" sz="1700" dirty="0"/>
           </a:p>
         </p:txBody>
       </p:sp>
@@ -2531,7 +2730,7 @@
                 <a:ea typeface="Arial" pitchFamily="34" charset="-122"/>
                 <a:cs typeface="Arial" pitchFamily="34" charset="-120"/>
               </a:rPr>
-              <a:t>QUESTION 2 OF 7</a:t>
+              <a:t>QUESTION 2 OF 8</a:t>
             </a:r>
             <a:endParaRPr lang="en-US" sz="1300" dirty="0"/>
           </a:p>
@@ -2623,17 +2822,17 @@
               <a:buNone/>
             </a:pPr>
             <a:r>
-              <a:rPr lang="en-US" sz="2000" b="1" dirty="0">
-                <a:solidFill>
-                  <a:srgbClr val="FFFFFF"/>
-                </a:solidFill>
-                <a:latin typeface="Arial" pitchFamily="34" charset="0"/>
-                <a:ea typeface="Arial" pitchFamily="34" charset="-122"/>
-                <a:cs typeface="Arial" pitchFamily="34" charset="-120"/>
-              </a:rPr>
-              <a:t>Learners soaked hard-coated Senna seeds in water for several hours. The seeds did not swell. Which is the most likely reason?</a:t>
-            </a:r>
-            <a:endParaRPr lang="en-US" sz="2000" dirty="0"/>
+              <a:rPr lang="en-US" sz="1600" b="1" dirty="0">
+                <a:solidFill>
+                  <a:srgbClr val="FFFFFF"/>
+                </a:solidFill>
+                <a:latin typeface="Arial" pitchFamily="34" charset="0"/>
+                <a:ea typeface="Arial" pitchFamily="34" charset="-122"/>
+                <a:cs typeface="Arial" pitchFamily="34" charset="-120"/>
+              </a:rPr>
+              <a:t>Of 100 Rosecoco bean seeds planted, 20 did not germinate. The reasons were: 8 had a hard impermeable seed coat, 6 were in a waterlogged patch, 4 were old seed with dead embryos, and 2 were eaten by pests. How many of the 20 non-germinating beans failed for reasons OTHER than dormancy?</a:t>
+            </a:r>
+            <a:endParaRPr lang="en-US" sz="1600" dirty="0"/>
           </a:p>
         </p:txBody>
       </p:sp>
@@ -2731,7 +2930,7 @@
                 <a:ea typeface="Arial" pitchFamily="34" charset="-122"/>
                 <a:cs typeface="Arial" pitchFamily="34" charset="-120"/>
               </a:rPr>
-              <a:t>The embryo was too large to take up water</a:t>
+              <a:t>12</a:t>
             </a:r>
             <a:endParaRPr lang="en-US" sz="1700" dirty="0"/>
           </a:p>
@@ -2831,7 +3030,7 @@
                 <a:ea typeface="Arial" pitchFamily="34" charset="-122"/>
                 <a:cs typeface="Arial" pitchFamily="34" charset="-120"/>
               </a:rPr>
-              <a:t>The hard seed coat did not let water enter the seed</a:t>
+              <a:t>14</a:t>
             </a:r>
             <a:endParaRPr lang="en-US" sz="1700" dirty="0"/>
           </a:p>
@@ -2931,7 +3130,7 @@
                 <a:ea typeface="Arial" pitchFamily="34" charset="-122"/>
                 <a:cs typeface="Arial" pitchFamily="34" charset="-120"/>
               </a:rPr>
-              <a:t>The seeds had absorbed too much water already</a:t>
+              <a:t>8</a:t>
             </a:r>
             <a:endParaRPr lang="en-US" sz="1700" dirty="0"/>
           </a:p>
@@ -3031,7 +3230,7 @@
                 <a:ea typeface="Arial" pitchFamily="34" charset="-122"/>
                 <a:cs typeface="Arial" pitchFamily="34" charset="-120"/>
               </a:rPr>
-              <a:t>Soaking always kills seeds that have hard coats</a:t>
+              <a:t>6</a:t>
             </a:r>
             <a:endParaRPr lang="en-US" sz="1700" dirty="0"/>
           </a:p>
@@ -3141,7 +3340,7 @@
                 <a:ea typeface="Arial" pitchFamily="34" charset="-122"/>
                 <a:cs typeface="Arial" pitchFamily="34" charset="-120"/>
               </a:rPr>
-              <a:t>QUESTION 3 OF 7</a:t>
+              <a:t>QUESTION 3 OF 8</a:t>
             </a:r>
             <a:endParaRPr lang="en-US" sz="1300" dirty="0"/>
           </a:p>
@@ -3233,17 +3432,17 @@
               <a:buNone/>
             </a:pPr>
             <a:r>
-              <a:rPr lang="en-US" sz="2000" b="1" dirty="0">
-                <a:solidFill>
-                  <a:srgbClr val="FFFFFF"/>
-                </a:solidFill>
-                <a:latin typeface="Arial" pitchFamily="34" charset="0"/>
-                <a:ea typeface="Arial" pitchFamily="34" charset="-122"/>
-                <a:cs typeface="Arial" pitchFamily="34" charset="-120"/>
-              </a:rPr>
-              <a:t>In a dormancy-breaking investigation, one container holds untreated seeds kept moist in the same place as the treated seeds. Why is this container needed?</a:t>
-            </a:r>
-            <a:endParaRPr lang="en-US" sz="2000" dirty="0"/>
+              <a:rPr lang="en-US" sz="1600" b="1" dirty="0">
+                <a:solidFill>
+                  <a:srgbClr val="FFFFFF"/>
+                </a:solidFill>
+                <a:latin typeface="Arial" pitchFamily="34" charset="0"/>
+                <a:ea typeface="Arial" pitchFamily="34" charset="-122"/>
+                <a:cs typeface="Arial" pitchFamily="34" charset="-120"/>
+              </a:rPr>
+              <a:t>In Mr. Wafula's field, 12 maize seeds did not germinate: 5 were eaten or rotted by fungi or pests, 4 were old seeds with dead embryos, and 3 were in a waterlogged patch. Among the 20 non-germinating beans, 8 had a hard impermeable seed coat. Which conclusion is supported by this data?</a:t>
+            </a:r>
+            <a:endParaRPr lang="en-US" sz="1600" dirty="0"/>
           </a:p>
         </p:txBody>
       </p:sp>
@@ -3341,7 +3540,7 @@
                 <a:ea typeface="Arial" pitchFamily="34" charset="-122"/>
                 <a:cs typeface="Arial" pitchFamily="34" charset="-120"/>
               </a:rPr>
-              <a:t>To give the treated seeds extra water</a:t>
+              <a:t>Maize seeds can never be dormant</a:t>
             </a:r>
             <a:endParaRPr lang="en-US" sz="1500" dirty="0"/>
           </a:p>
@@ -3441,7 +3640,7 @@
                 <a:ea typeface="Arial" pitchFamily="34" charset="-122"/>
                 <a:cs typeface="Arial" pitchFamily="34" charset="-120"/>
               </a:rPr>
-              <a:t>To make sure all the seeds germinate</a:t>
+              <a:t>Dormancy caused all the bean failures but none of the maize failures</a:t>
             </a:r>
             <a:endParaRPr lang="en-US" sz="1500" dirty="0"/>
           </a:p>
@@ -3541,7 +3740,7 @@
                 <a:ea typeface="Arial" pitchFamily="34" charset="-122"/>
                 <a:cs typeface="Arial" pitchFamily="34" charset="-120"/>
               </a:rPr>
-              <a:t>To show the seeds in the other containers are not dormant</a:t>
+              <a:t>Dormancy explained 8 of the 20 bean failures and none of the 12 maize failures in this field</a:t>
             </a:r>
             <a:endParaRPr lang="en-US" sz="1500" dirty="0"/>
           </a:p>
@@ -3641,7 +3840,7 @@
                 <a:ea typeface="Arial" pitchFamily="34" charset="-122"/>
                 <a:cs typeface="Arial" pitchFamily="34" charset="-120"/>
               </a:rPr>
-              <a:t>To compare with the treated seeds, so we can tell whether the treatment made a difference</a:t>
+              <a:t>The hard seed coat caused most of the maize failures</a:t>
             </a:r>
             <a:endParaRPr lang="en-US" sz="1500" dirty="0"/>
           </a:p>
@@ -3751,7 +3950,7 @@
                 <a:ea typeface="Arial" pitchFamily="34" charset="-122"/>
                 <a:cs typeface="Arial" pitchFamily="34" charset="-120"/>
               </a:rPr>
-              <a:t>QUESTION 4 OF 7</a:t>
+              <a:t>QUESTION 4 OF 8</a:t>
             </a:r>
             <a:endParaRPr lang="en-US" sz="1300" dirty="0"/>
           </a:p>
@@ -3843,17 +4042,17 @@
               <a:buNone/>
             </a:pPr>
             <a:r>
-              <a:rPr lang="en-US" sz="2300" b="1" dirty="0">
-                <a:solidFill>
-                  <a:srgbClr val="FFFFFF"/>
-                </a:solidFill>
-                <a:latin typeface="Arial" pitchFamily="34" charset="0"/>
-                <a:ea typeface="Arial" pitchFamily="34" charset="-122"/>
-                <a:cs typeface="Arial" pitchFamily="34" charset="-120"/>
-              </a:rPr>
-              <a:t>A group wants to break dormancy in Acacia seeds by scarification. Which action is scarification?</a:t>
-            </a:r>
-            <a:endParaRPr lang="en-US" sz="2300" dirty="0"/>
+              <a:rPr lang="en-US" sz="2000" b="1" dirty="0">
+                <a:solidFill>
+                  <a:srgbClr val="FFFFFF"/>
+                </a:solidFill>
+                <a:latin typeface="Arial" pitchFamily="34" charset="0"/>
+                <a:ea typeface="Arial" pitchFamily="34" charset="-122"/>
+                <a:cs typeface="Arial" pitchFamily="34" charset="-120"/>
+              </a:rPr>
+              <a:t>The 8 hard-coated bean seeds were scarified (nicked) and replanted. By Day 7, 7 of the 8 had germinated. What percentage of the 8 seeds germinated?</a:t>
+            </a:r>
+            <a:endParaRPr lang="en-US" sz="2000" dirty="0"/>
           </a:p>
         </p:txBody>
       </p:sp>
@@ -3951,7 +4150,7 @@
                 <a:ea typeface="Arial" pitchFamily="34" charset="-122"/>
                 <a:cs typeface="Arial" pitchFamily="34" charset="-120"/>
               </a:rPr>
-              <a:t>Washing the seeds in several changes of water</a:t>
+              <a:t>70%</a:t>
             </a:r>
             <a:endParaRPr lang="en-US" sz="1700" dirty="0"/>
           </a:p>
@@ -4051,7 +4250,7 @@
                 <a:ea typeface="Arial" pitchFamily="34" charset="-122"/>
                 <a:cs typeface="Arial" pitchFamily="34" charset="-120"/>
               </a:rPr>
-              <a:t>Leaving the seeds in dry soil for a month</a:t>
+              <a:t>7.8%</a:t>
             </a:r>
             <a:endParaRPr lang="en-US" sz="1700" dirty="0"/>
           </a:p>
@@ -4151,7 +4350,7 @@
                 <a:ea typeface="Arial" pitchFamily="34" charset="-122"/>
                 <a:cs typeface="Arial" pitchFamily="34" charset="-120"/>
               </a:rPr>
-              <a:t>Rubbing the seed coat lightly on sandpaper or a rough stone</a:t>
+              <a:t>87.5%</a:t>
             </a:r>
             <a:endParaRPr lang="en-US" sz="1700" dirty="0"/>
           </a:p>
@@ -4251,7 +4450,7 @@
                 <a:ea typeface="Arial" pitchFamily="34" charset="-122"/>
                 <a:cs typeface="Arial" pitchFamily="34" charset="-120"/>
               </a:rPr>
-              <a:t>Keeping the seeds in a cool place for some days</a:t>
+              <a:t>12.5%</a:t>
             </a:r>
             <a:endParaRPr lang="en-US" sz="1700" dirty="0"/>
           </a:p>
@@ -4361,7 +4560,7 @@
                 <a:ea typeface="Arial" pitchFamily="34" charset="-122"/>
                 <a:cs typeface="Arial" pitchFamily="34" charset="-120"/>
               </a:rPr>
-              <a:t>QUESTION 5 OF 7</a:t>
+              <a:t>QUESTION 5 OF 8</a:t>
             </a:r>
             <a:endParaRPr lang="en-US" sz="1300" dirty="0"/>
           </a:p>
@@ -4453,17 +4652,17 @@
               <a:buNone/>
             </a:pPr>
             <a:r>
-              <a:rPr lang="en-US" sz="2000" b="1" dirty="0">
-                <a:solidFill>
-                  <a:srgbClr val="FFFFFF"/>
-                </a:solidFill>
-                <a:latin typeface="Arial" pitchFamily="34" charset="0"/>
-                <a:ea typeface="Arial" pitchFamily="34" charset="-122"/>
-                <a:cs typeface="Arial" pitchFamily="34" charset="-120"/>
-              </a:rPr>
-              <a:t>A farmer finds that some healthy seeds contain chemical inhibitors that stop germination. Which treatment would best help remove the inhibitors?</a:t>
-            </a:r>
-            <a:endParaRPr lang="en-US" sz="2000" dirty="0"/>
+              <a:rPr lang="en-US" sz="2300" b="1" dirty="0">
+                <a:solidFill>
+                  <a:srgbClr val="FFFFFF"/>
+                </a:solidFill>
+                <a:latin typeface="Arial" pitchFamily="34" charset="0"/>
+                <a:ea typeface="Arial" pitchFamily="34" charset="-122"/>
+                <a:cs typeface="Arial" pitchFamily="34" charset="-120"/>
+              </a:rPr>
+              <a:t>Why did scarifying (nicking or rubbing) the hard seed coat of the dormant bean seeds help them germinate?</a:t>
+            </a:r>
+            <a:endParaRPr lang="en-US" sz="2300" dirty="0"/>
           </a:p>
         </p:txBody>
       </p:sp>
@@ -4553,17 +4752,17 @@
               <a:buNone/>
             </a:pPr>
             <a:r>
-              <a:rPr lang="en-US" sz="1700" dirty="0">
-                <a:solidFill>
-                  <a:srgbClr val="FFFFFF"/>
-                </a:solidFill>
-                <a:latin typeface="Arial" pitchFamily="34" charset="0"/>
-                <a:ea typeface="Arial" pitchFamily="34" charset="-122"/>
-                <a:cs typeface="Arial" pitchFamily="34" charset="-120"/>
-              </a:rPr>
-              <a:t>Washing the seeds in several changes of water (leaching)</a:t>
-            </a:r>
-            <a:endParaRPr lang="en-US" sz="1700" dirty="0"/>
+              <a:rPr lang="en-US" sz="1500" dirty="0">
+                <a:solidFill>
+                  <a:srgbClr val="FFFFFF"/>
+                </a:solidFill>
+                <a:latin typeface="Arial" pitchFamily="34" charset="0"/>
+                <a:ea typeface="Arial" pitchFamily="34" charset="-122"/>
+                <a:cs typeface="Arial" pitchFamily="34" charset="-120"/>
+              </a:rPr>
+              <a:t>It added food to the seed so the embryo could grow</a:t>
+            </a:r>
+            <a:endParaRPr lang="en-US" sz="1500" dirty="0"/>
           </a:p>
         </p:txBody>
       </p:sp>
@@ -4653,17 +4852,17 @@
               <a:buNone/>
             </a:pPr>
             <a:r>
-              <a:rPr lang="en-US" sz="1700" dirty="0">
-                <a:solidFill>
-                  <a:srgbClr val="FFFFFF"/>
-                </a:solidFill>
-                <a:latin typeface="Arial" pitchFamily="34" charset="0"/>
-                <a:ea typeface="Arial" pitchFamily="34" charset="-122"/>
-                <a:cs typeface="Arial" pitchFamily="34" charset="-120"/>
-              </a:rPr>
-              <a:t>Drying the seeds in the sun for a week</a:t>
-            </a:r>
-            <a:endParaRPr lang="en-US" sz="1700" dirty="0"/>
+              <a:rPr lang="en-US" sz="1500" dirty="0">
+                <a:solidFill>
+                  <a:srgbClr val="FFFFFF"/>
+                </a:solidFill>
+                <a:latin typeface="Arial" pitchFamily="34" charset="0"/>
+                <a:ea typeface="Arial" pitchFamily="34" charset="-122"/>
+                <a:cs typeface="Arial" pitchFamily="34" charset="-120"/>
+              </a:rPr>
+              <a:t>It made the embryo larger before planting</a:t>
+            </a:r>
+            <a:endParaRPr lang="en-US" sz="1500" dirty="0"/>
           </a:p>
         </p:txBody>
       </p:sp>
@@ -4753,17 +4952,17 @@
               <a:buNone/>
             </a:pPr>
             <a:r>
-              <a:rPr lang="en-US" sz="1700" dirty="0">
-                <a:solidFill>
-                  <a:srgbClr val="FFFFFF"/>
-                </a:solidFill>
-                <a:latin typeface="Arial" pitchFamily="34" charset="0"/>
-                <a:ea typeface="Arial" pitchFamily="34" charset="-122"/>
-                <a:cs typeface="Arial" pitchFamily="34" charset="-120"/>
-              </a:rPr>
-              <a:t>Putting the seeds in boiling water</a:t>
-            </a:r>
-            <a:endParaRPr lang="en-US" sz="1700" dirty="0"/>
+              <a:rPr lang="en-US" sz="1500" dirty="0">
+                <a:solidFill>
+                  <a:srgbClr val="FFFFFF"/>
+                </a:solidFill>
+                <a:latin typeface="Arial" pitchFamily="34" charset="0"/>
+                <a:ea typeface="Arial" pitchFamily="34" charset="-122"/>
+                <a:cs typeface="Arial" pitchFamily="34" charset="-120"/>
+              </a:rPr>
+              <a:t>It made a small opening in the impermeable testa so water and oxygen could reach the embryo</a:t>
+            </a:r>
+            <a:endParaRPr lang="en-US" sz="1500" dirty="0"/>
           </a:p>
         </p:txBody>
       </p:sp>
@@ -4853,17 +5052,17 @@
               <a:buNone/>
             </a:pPr>
             <a:r>
-              <a:rPr lang="en-US" sz="1700" dirty="0">
-                <a:solidFill>
-                  <a:srgbClr val="FFFFFF"/>
-                </a:solidFill>
-                <a:latin typeface="Arial" pitchFamily="34" charset="0"/>
-                <a:ea typeface="Arial" pitchFamily="34" charset="-122"/>
-                <a:cs typeface="Arial" pitchFamily="34" charset="-120"/>
-              </a:rPr>
-              <a:t>Rubbing the seed coat on sandpaper only</a:t>
-            </a:r>
-            <a:endParaRPr lang="en-US" sz="1700" dirty="0"/>
+              <a:rPr lang="en-US" sz="1500" dirty="0">
+                <a:solidFill>
+                  <a:srgbClr val="FFFFFF"/>
+                </a:solidFill>
+                <a:latin typeface="Arial" pitchFamily="34" charset="0"/>
+                <a:ea typeface="Arial" pitchFamily="34" charset="-122"/>
+                <a:cs typeface="Arial" pitchFamily="34" charset="-120"/>
+              </a:rPr>
+              <a:t>It killed the pests living inside the seed</a:t>
+            </a:r>
+            <a:endParaRPr lang="en-US" sz="1500" dirty="0"/>
           </a:p>
         </p:txBody>
       </p:sp>
@@ -4971,7 +5170,7 @@
                 <a:ea typeface="Arial" pitchFamily="34" charset="-122"/>
                 <a:cs typeface="Arial" pitchFamily="34" charset="-120"/>
               </a:rPr>
-              <a:t>QUESTION 6 OF 7</a:t>
+              <a:t>QUESTION 6 OF 8</a:t>
             </a:r>
             <a:endParaRPr lang="en-US" sz="1300" dirty="0"/>
           </a:p>
@@ -5071,7 +5270,7 @@
                 <a:ea typeface="Arial" pitchFamily="34" charset="-122"/>
                 <a:cs typeface="Arial" pitchFamily="34" charset="-120"/>
               </a:rPr>
-              <a:t>After the seed coat of a dormant bean seed is rubbed and the seed is placed in wet cotton wool, the seed swells. What is this uptake of water called, and why is it important for germination?</a:t>
+              <a:t>A farmer finds that some seeds stay dormant because of a chemical inhibitor, abscisic acid, in the seed. Which way of breaking dormancy matches this cause best?</a:t>
             </a:r>
             <a:endParaRPr lang="en-US" sz="2000" dirty="0"/>
           </a:p>
@@ -5171,7 +5370,7 @@
                 <a:ea typeface="Arial" pitchFamily="34" charset="-122"/>
                 <a:cs typeface="Arial" pitchFamily="34" charset="-120"/>
               </a:rPr>
-              <a:t>Imbibition; it activates enzymes in the embryo</a:t>
+              <a:t>Planting the seeds in a waterlogged patch</a:t>
             </a:r>
             <a:endParaRPr lang="en-US" sz="1700" dirty="0"/>
           </a:p>
@@ -5271,7 +5470,7 @@
                 <a:ea typeface="Arial" pitchFamily="34" charset="-122"/>
                 <a:cs typeface="Arial" pitchFamily="34" charset="-120"/>
               </a:rPr>
-              <a:t>Scarification; it makes the seed coat thicker</a:t>
+              <a:t>Soaking the seeds in water for some hours so the inhibitor is washed out</a:t>
             </a:r>
             <a:endParaRPr lang="en-US" sz="1700" dirty="0"/>
           </a:p>
@@ -5371,7 +5570,7 @@
                 <a:ea typeface="Arial" pitchFamily="34" charset="-122"/>
                 <a:cs typeface="Arial" pitchFamily="34" charset="-120"/>
               </a:rPr>
-              <a:t>Leaching; it washes inhibitors out of the embryo</a:t>
+              <a:t>Rubbing the seed coat with sandpaper</a:t>
             </a:r>
             <a:endParaRPr lang="en-US" sz="1700" dirty="0"/>
           </a:p>
@@ -5471,7 +5670,7 @@
                 <a:ea typeface="Arial" pitchFamily="34" charset="-122"/>
                 <a:cs typeface="Arial" pitchFamily="34" charset="-120"/>
               </a:rPr>
-              <a:t>Stratification; it keeps the embryo cold and inactive</a:t>
+              <a:t>Storing the seeds in sunlight and adding fertiliser</a:t>
             </a:r>
             <a:endParaRPr lang="en-US" sz="1700" dirty="0"/>
           </a:p>
@@ -5581,7 +5780,7 @@
                 <a:ea typeface="Arial" pitchFamily="34" charset="-122"/>
                 <a:cs typeface="Arial" pitchFamily="34" charset="-120"/>
               </a:rPr>
-              <a:t>QUESTION 7 OF 7</a:t>
+              <a:t>QUESTION 7 OF 8</a:t>
             </a:r>
             <a:endParaRPr lang="en-US" sz="1300" dirty="0"/>
           </a:p>
@@ -5642,7 +5841,7 @@
                 <a:ea typeface="Arial" pitchFamily="34" charset="-122"/>
                 <a:cs typeface="Arial" pitchFamily="34" charset="-120"/>
               </a:rPr>
-              <a:t>Use after: End of lesson</a:t>
+              <a:t>Use after: DQB phase</a:t>
             </a:r>
             <a:endParaRPr lang="en-US" sz="1100" dirty="0"/>
           </a:p>
@@ -5673,17 +5872,17 @@
               <a:buNone/>
             </a:pPr>
             <a:r>
-              <a:rPr lang="en-US" sz="2300" b="1" dirty="0">
-                <a:solidFill>
-                  <a:srgbClr val="FFFFFF"/>
-                </a:solidFill>
-                <a:latin typeface="Arial" pitchFamily="34" charset="0"/>
-                <a:ea typeface="Arial" pitchFamily="34" charset="-122"/>
-                <a:cs typeface="Arial" pitchFamily="34" charset="-120"/>
-              </a:rPr>
-              <a:t>Acacia seeds in the Tsavo drylands can stay dormant for a long time. How does dormancy help these plants survive?</a:t>
-            </a:r>
-            <a:endParaRPr lang="en-US" sz="2300" dirty="0"/>
+              <a:rPr lang="en-US" sz="2000" b="1" dirty="0">
+                <a:solidFill>
+                  <a:srgbClr val="FFFFFF"/>
+                </a:solidFill>
+                <a:latin typeface="Arial" pitchFamily="34" charset="0"/>
+                <a:ea typeface="Arial" pitchFamily="34" charset="-122"/>
+                <a:cs typeface="Arial" pitchFamily="34" charset="-120"/>
+              </a:rPr>
+              <a:t>A learner says, 'A seed that does not germinate must be dead.' Which group of non-germinating bean seeds from Mr. Wafula's field shows that this idea is wrong?</a:t>
+            </a:r>
+            <a:endParaRPr lang="en-US" sz="2000" dirty="0"/>
           </a:p>
         </p:txBody>
       </p:sp>
@@ -5773,17 +5972,17 @@
               <a:buNone/>
             </a:pPr>
             <a:r>
-              <a:rPr lang="en-US" sz="1500" dirty="0">
-                <a:solidFill>
-                  <a:srgbClr val="FFFFFF"/>
-                </a:solidFill>
-                <a:latin typeface="Arial" pitchFamily="34" charset="0"/>
-                <a:ea typeface="Arial" pitchFamily="34" charset="-122"/>
-                <a:cs typeface="Arial" pitchFamily="34" charset="-120"/>
-              </a:rPr>
-              <a:t>It makes the seeds germinate faster than other plants' seeds</a:t>
-            </a:r>
-            <a:endParaRPr lang="en-US" sz="1500" dirty="0"/>
+              <a:rPr lang="en-US" sz="1700" dirty="0">
+                <a:solidFill>
+                  <a:srgbClr val="FFFFFF"/>
+                </a:solidFill>
+                <a:latin typeface="Arial" pitchFamily="34" charset="0"/>
+                <a:ea typeface="Arial" pitchFamily="34" charset="-122"/>
+                <a:cs typeface="Arial" pitchFamily="34" charset="-120"/>
+              </a:rPr>
+              <a:t>The 4 old seeds with dead embryos</a:t>
+            </a:r>
+            <a:endParaRPr lang="en-US" sz="1700" dirty="0"/>
           </a:p>
         </p:txBody>
       </p:sp>
@@ -5873,17 +6072,17 @@
               <a:buNone/>
             </a:pPr>
             <a:r>
-              <a:rPr lang="en-US" sz="1500" dirty="0">
-                <a:solidFill>
-                  <a:srgbClr val="FFFFFF"/>
-                </a:solidFill>
-                <a:latin typeface="Arial" pitchFamily="34" charset="0"/>
-                <a:ea typeface="Arial" pitchFamily="34" charset="-122"/>
-                <a:cs typeface="Arial" pitchFamily="34" charset="-120"/>
-              </a:rPr>
-              <a:t>It removes the need for water when the seeds finally germinate</a:t>
-            </a:r>
-            <a:endParaRPr lang="en-US" sz="1500" dirty="0"/>
+              <a:rPr lang="en-US" sz="1700" dirty="0">
+                <a:solidFill>
+                  <a:srgbClr val="FFFFFF"/>
+                </a:solidFill>
+                <a:latin typeface="Arial" pitchFamily="34" charset="0"/>
+                <a:ea typeface="Arial" pitchFamily="34" charset="-122"/>
+                <a:cs typeface="Arial" pitchFamily="34" charset="-120"/>
+              </a:rPr>
+              <a:t>The 8 hard-coated seeds, of which 7 germinated after scarification</a:t>
+            </a:r>
+            <a:endParaRPr lang="en-US" sz="1700" dirty="0"/>
           </a:p>
         </p:txBody>
       </p:sp>
@@ -5973,17 +6172,17 @@
               <a:buNone/>
             </a:pPr>
             <a:r>
-              <a:rPr lang="en-US" sz="1500" dirty="0">
-                <a:solidFill>
-                  <a:srgbClr val="FFFFFF"/>
-                </a:solidFill>
-                <a:latin typeface="Arial" pitchFamily="34" charset="0"/>
-                <a:ea typeface="Arial" pitchFamily="34" charset="-122"/>
-                <a:cs typeface="Arial" pitchFamily="34" charset="-120"/>
-              </a:rPr>
-              <a:t>It makes every seed in the soil germinate on the first rain</a:t>
-            </a:r>
-            <a:endParaRPr lang="en-US" sz="1500" dirty="0"/>
+              <a:rPr lang="en-US" sz="1700" dirty="0">
+                <a:solidFill>
+                  <a:srgbClr val="FFFFFF"/>
+                </a:solidFill>
+                <a:latin typeface="Arial" pitchFamily="34" charset="0"/>
+                <a:ea typeface="Arial" pitchFamily="34" charset="-122"/>
+                <a:cs typeface="Arial" pitchFamily="34" charset="-120"/>
+              </a:rPr>
+              <a:t>The 5 maize seeds eaten or rotted by fungi</a:t>
+            </a:r>
+            <a:endParaRPr lang="en-US" sz="1700" dirty="0"/>
           </a:p>
         </p:txBody>
       </p:sp>
@@ -6073,17 +6272,17 @@
               <a:buNone/>
             </a:pPr>
             <a:r>
-              <a:rPr lang="en-US" sz="1500" dirty="0">
-                <a:solidFill>
-                  <a:srgbClr val="FFFFFF"/>
-                </a:solidFill>
-                <a:latin typeface="Arial" pitchFamily="34" charset="0"/>
-                <a:ea typeface="Arial" pitchFamily="34" charset="-122"/>
-                <a:cs typeface="Arial" pitchFamily="34" charset="-120"/>
-              </a:rPr>
-              <a:t>It stops seeds from germinating in a short dry spell, and it spreads germination over time</a:t>
-            </a:r>
-            <a:endParaRPr lang="en-US" sz="1500" dirty="0"/>
+              <a:rPr lang="en-US" sz="1700" dirty="0">
+                <a:solidFill>
+                  <a:srgbClr val="FFFFFF"/>
+                </a:solidFill>
+                <a:latin typeface="Arial" pitchFamily="34" charset="0"/>
+                <a:ea typeface="Arial" pitchFamily="34" charset="-122"/>
+                <a:cs typeface="Arial" pitchFamily="34" charset="-120"/>
+              </a:rPr>
+              <a:t>The 2 seeds eaten by pests</a:t>
+            </a:r>
+            <a:endParaRPr lang="en-US" sz="1700" dirty="0"/>
           </a:p>
         </p:txBody>
       </p:sp>
@@ -6140,7 +6339,7 @@
     <p:bg>
       <p:bgPr>
         <a:solidFill>
-          <a:srgbClr val="1F3864"/>
+          <a:srgbClr val="6A4C93"/>
         </a:solidFill>
       </p:bgPr>
     </p:bg>
@@ -6166,73 +6365,573 @@
         </p:nvSpPr>
         <p:spPr>
           <a:xfrm>
-            <a:off x="731520" y="2194560"/>
-            <a:ext cx="10698480" cy="822960"/>
-          </a:xfrm>
-          <a:prstGeom prst="rect">
-            <a:avLst/>
-          </a:prstGeom>
-          <a:noFill/>
-          <a:ln/>
-        </p:spPr>
-        <p:txBody>
-          <a:bodyPr wrap="square" lIns="0" tIns="0" rIns="0" bIns="0" rtlCol="0" anchor="ctr"/>
-          <a:lstStyle/>
-          <a:p>
-            <a:pPr indent="0" marL="0">
-              <a:buNone/>
-            </a:pPr>
-            <a:r>
-              <a:rPr lang="en-US" sz="3400" b="1" dirty="0">
-                <a:solidFill>
-                  <a:srgbClr val="FFFFFF"/>
-                </a:solidFill>
-                <a:latin typeface="Arial" pitchFamily="34" charset="0"/>
-                <a:ea typeface="Arial" pitchFamily="34" charset="-122"/>
-                <a:cs typeface="Arial" pitchFamily="34" charset="-120"/>
-              </a:rPr>
-              <a:t>All done</a:t>
-            </a:r>
-            <a:endParaRPr lang="en-US" sz="3400" dirty="0"/>
-          </a:p>
-        </p:txBody>
-      </p:sp>
-      <p:sp>
-        <p:nvSpPr>
-          <p:cNvPr id="3" name="Text 1"/>
-          <p:cNvSpPr/>
-          <p:nvPr/>
-        </p:nvSpPr>
-        <p:spPr>
-          <a:xfrm>
-            <a:off x="731520" y="3108960"/>
-            <a:ext cx="10698480" cy="731520"/>
-          </a:xfrm>
-          <a:prstGeom prst="rect">
-            <a:avLst/>
-          </a:prstGeom>
-          <a:noFill/>
-          <a:ln/>
-        </p:spPr>
-        <p:txBody>
-          <a:bodyPr wrap="square" lIns="0" tIns="0" rIns="0" bIns="0" rtlCol="0" anchor="ctr"/>
-          <a:lstStyle/>
-          <a:p>
-            <a:pPr indent="0" marL="0">
-              <a:buNone/>
-            </a:pPr>
-            <a:r>
-              <a:rPr lang="en-US" sz="1800" dirty="0">
-                <a:solidFill>
-                  <a:srgbClr val="D9EEF1"/>
-                </a:solidFill>
-                <a:latin typeface="Arial" pitchFamily="34" charset="0"/>
-                <a:ea typeface="Arial" pitchFamily="34" charset="-122"/>
-                <a:cs typeface="Arial" pitchFamily="34" charset="-120"/>
-              </a:rPr>
-              <a:t>Ask your teacher how to submit your answers today (for example, on a paper answer slip).</a:t>
+            <a:off x="548640" y="365760"/>
+            <a:ext cx="6400800" cy="365760"/>
+          </a:xfrm>
+          <a:prstGeom prst="rect">
+            <a:avLst/>
+          </a:prstGeom>
+          <a:noFill/>
+          <a:ln/>
+        </p:spPr>
+        <p:txBody>
+          <a:bodyPr wrap="square" lIns="0" tIns="0" rIns="0" bIns="0" rtlCol="0" anchor="ctr"/>
+          <a:lstStyle/>
+          <a:p>
+            <a:pPr indent="0" marL="0">
+              <a:buNone/>
+            </a:pPr>
+            <a:r>
+              <a:rPr lang="en-US" sz="1300" b="1" spc="200" kern="0" dirty="0">
+                <a:solidFill>
+                  <a:srgbClr val="E0D6F0"/>
+                </a:solidFill>
+                <a:latin typeface="Arial" pitchFamily="34" charset="0"/>
+                <a:ea typeface="Arial" pitchFamily="34" charset="-122"/>
+                <a:cs typeface="Arial" pitchFamily="34" charset="-120"/>
+              </a:rPr>
+              <a:t>QUESTION 8 OF 8</a:t>
+            </a:r>
+            <a:endParaRPr lang="en-US" sz="1300" dirty="0"/>
+          </a:p>
+        </p:txBody>
+      </p:sp>
+      <p:sp>
+        <p:nvSpPr>
+          <p:cNvPr id="3" name="Shape 1"/>
+          <p:cNvSpPr/>
+          <p:nvPr/>
+        </p:nvSpPr>
+        <p:spPr>
+          <a:xfrm>
+            <a:off x="8138160" y="320040"/>
+            <a:ext cx="3474720" cy="365760"/>
+          </a:xfrm>
+          <a:prstGeom prst="roundRect">
+            <a:avLst>
+              <a:gd name="adj" fmla="val 15000"/>
+            </a:avLst>
+          </a:prstGeom>
+          <a:solidFill>
+            <a:srgbClr val="5A3F80"/>
+          </a:solidFill>
+          <a:ln/>
+        </p:spPr>
+      </p:sp>
+      <p:sp>
+        <p:nvSpPr>
+          <p:cNvPr id="4" name="Text 2"/>
+          <p:cNvSpPr/>
+          <p:nvPr/>
+        </p:nvSpPr>
+        <p:spPr>
+          <a:xfrm>
+            <a:off x="8138160" y="320040"/>
+            <a:ext cx="3474720" cy="365760"/>
+          </a:xfrm>
+          <a:prstGeom prst="rect">
+            <a:avLst/>
+          </a:prstGeom>
+          <a:noFill/>
+          <a:ln/>
+        </p:spPr>
+        <p:txBody>
+          <a:bodyPr wrap="square" lIns="0" tIns="0" rIns="0" bIns="0" rtlCol="0" anchor="ctr"/>
+          <a:lstStyle/>
+          <a:p>
+            <a:pPr algn="ctr" indent="0" marL="0">
+              <a:buNone/>
+            </a:pPr>
+            <a:r>
+              <a:rPr lang="en-US" sz="1100" i="1" dirty="0">
+                <a:solidFill>
+                  <a:srgbClr val="E0D6F0"/>
+                </a:solidFill>
+                <a:latin typeface="Arial" pitchFamily="34" charset="0"/>
+                <a:ea typeface="Arial" pitchFamily="34" charset="-122"/>
+                <a:cs typeface="Arial" pitchFamily="34" charset="-120"/>
+              </a:rPr>
+              <a:t>Use after: End of lesson</a:t>
+            </a:r>
+            <a:endParaRPr lang="en-US" sz="1100" dirty="0"/>
+          </a:p>
+        </p:txBody>
+      </p:sp>
+      <p:sp>
+        <p:nvSpPr>
+          <p:cNvPr id="5" name="Text 3"/>
+          <p:cNvSpPr/>
+          <p:nvPr/>
+        </p:nvSpPr>
+        <p:spPr>
+          <a:xfrm>
+            <a:off x="548640" y="868680"/>
+            <a:ext cx="11064240" cy="1325880"/>
+          </a:xfrm>
+          <a:prstGeom prst="rect">
+            <a:avLst/>
+          </a:prstGeom>
+          <a:noFill/>
+          <a:ln/>
+        </p:spPr>
+        <p:txBody>
+          <a:bodyPr wrap="square" lIns="0" tIns="0" rIns="0" bIns="0" rtlCol="0" anchor="ctr"/>
+          <a:lstStyle/>
+          <a:p>
+            <a:pPr indent="0" marL="0">
+              <a:buNone/>
+            </a:pPr>
+            <a:r>
+              <a:rPr lang="en-US" sz="2300" b="1" dirty="0">
+                <a:solidFill>
+                  <a:srgbClr val="FFFFFF"/>
+                </a:solidFill>
+                <a:latin typeface="Arial" pitchFamily="34" charset="0"/>
+                <a:ea typeface="Arial" pitchFamily="34" charset="-122"/>
+                <a:cs typeface="Arial" pitchFamily="34" charset="-120"/>
+              </a:rPr>
+              <a:t>Why can dormancy be useful to a wild plant but a problem for a farmer like Mr. Wafula?</a:t>
+            </a:r>
+            <a:endParaRPr lang="en-US" sz="2300" dirty="0"/>
+          </a:p>
+        </p:txBody>
+      </p:sp>
+      <p:sp>
+        <p:nvSpPr>
+          <p:cNvPr id="6" name="Shape 4"/>
+          <p:cNvSpPr/>
+          <p:nvPr/>
+        </p:nvSpPr>
+        <p:spPr>
+          <a:xfrm>
+            <a:off x="731520" y="2331720"/>
+            <a:ext cx="10698480" cy="777240"/>
+          </a:xfrm>
+          <a:prstGeom prst="roundRect">
+            <a:avLst>
+              <a:gd name="adj" fmla="val 9412"/>
+            </a:avLst>
+          </a:prstGeom>
+          <a:solidFill>
+            <a:srgbClr val="7C5CAA"/>
+          </a:solidFill>
+          <a:ln/>
+        </p:spPr>
+      </p:sp>
+      <p:sp>
+        <p:nvSpPr>
+          <p:cNvPr id="7" name="Text 5"/>
+          <p:cNvSpPr/>
+          <p:nvPr/>
+        </p:nvSpPr>
+        <p:spPr>
+          <a:xfrm>
+            <a:off x="914400" y="2331720"/>
+            <a:ext cx="548640" cy="777240"/>
+          </a:xfrm>
+          <a:prstGeom prst="rect">
+            <a:avLst/>
+          </a:prstGeom>
+          <a:noFill/>
+          <a:ln/>
+        </p:spPr>
+        <p:txBody>
+          <a:bodyPr wrap="square" lIns="0" tIns="0" rIns="0" bIns="0" rtlCol="0" anchor="ctr"/>
+          <a:lstStyle/>
+          <a:p>
+            <a:pPr indent="0" marL="0">
+              <a:buNone/>
+            </a:pPr>
+            <a:r>
+              <a:rPr lang="en-US" sz="1800" b="1" dirty="0">
+                <a:solidFill>
+                  <a:srgbClr val="FFFFFF"/>
+                </a:solidFill>
+                <a:latin typeface="Arial" pitchFamily="34" charset="0"/>
+                <a:ea typeface="Arial" pitchFamily="34" charset="-122"/>
+                <a:cs typeface="Arial" pitchFamily="34" charset="-120"/>
+              </a:rPr>
+              <a:t>A</a:t>
             </a:r>
             <a:endParaRPr lang="en-US" sz="1800" dirty="0"/>
+          </a:p>
+        </p:txBody>
+      </p:sp>
+      <p:sp>
+        <p:nvSpPr>
+          <p:cNvPr id="8" name="Text 6"/>
+          <p:cNvSpPr/>
+          <p:nvPr/>
+        </p:nvSpPr>
+        <p:spPr>
+          <a:xfrm>
+            <a:off x="1554480" y="2331720"/>
+            <a:ext cx="9692640" cy="777240"/>
+          </a:xfrm>
+          <a:prstGeom prst="rect">
+            <a:avLst/>
+          </a:prstGeom>
+          <a:noFill/>
+          <a:ln/>
+        </p:spPr>
+        <p:txBody>
+          <a:bodyPr wrap="square" lIns="0" tIns="0" rIns="0" bIns="0" rtlCol="0" anchor="ctr"/>
+          <a:lstStyle/>
+          <a:p>
+            <a:pPr indent="0" marL="0">
+              <a:buNone/>
+            </a:pPr>
+            <a:r>
+              <a:rPr lang="en-US" sz="1300" dirty="0">
+                <a:solidFill>
+                  <a:srgbClr val="FFFFFF"/>
+                </a:solidFill>
+                <a:latin typeface="Arial" pitchFamily="34" charset="0"/>
+                <a:ea typeface="Arial" pitchFamily="34" charset="-122"/>
+                <a:cs typeface="Arial" pitchFamily="34" charset="-120"/>
+              </a:rPr>
+              <a:t>Dormancy helps seeds survive dry or cold seasons and germinate over time, but the farmer wants all seeds to germinate together for a uniform stand</a:t>
+            </a:r>
+            <a:endParaRPr lang="en-US" sz="1300" dirty="0"/>
+          </a:p>
+        </p:txBody>
+      </p:sp>
+      <p:sp>
+        <p:nvSpPr>
+          <p:cNvPr id="9" name="Shape 7"/>
+          <p:cNvSpPr/>
+          <p:nvPr/>
+        </p:nvSpPr>
+        <p:spPr>
+          <a:xfrm>
+            <a:off x="731520" y="3246120"/>
+            <a:ext cx="10698480" cy="777240"/>
+          </a:xfrm>
+          <a:prstGeom prst="roundRect">
+            <a:avLst>
+              <a:gd name="adj" fmla="val 9412"/>
+            </a:avLst>
+          </a:prstGeom>
+          <a:solidFill>
+            <a:srgbClr val="7C5CAA"/>
+          </a:solidFill>
+          <a:ln/>
+        </p:spPr>
+      </p:sp>
+      <p:sp>
+        <p:nvSpPr>
+          <p:cNvPr id="10" name="Text 8"/>
+          <p:cNvSpPr/>
+          <p:nvPr/>
+        </p:nvSpPr>
+        <p:spPr>
+          <a:xfrm>
+            <a:off x="914400" y="3246120"/>
+            <a:ext cx="548640" cy="777240"/>
+          </a:xfrm>
+          <a:prstGeom prst="rect">
+            <a:avLst/>
+          </a:prstGeom>
+          <a:noFill/>
+          <a:ln/>
+        </p:spPr>
+        <p:txBody>
+          <a:bodyPr wrap="square" lIns="0" tIns="0" rIns="0" bIns="0" rtlCol="0" anchor="ctr"/>
+          <a:lstStyle/>
+          <a:p>
+            <a:pPr indent="0" marL="0">
+              <a:buNone/>
+            </a:pPr>
+            <a:r>
+              <a:rPr lang="en-US" sz="1800" b="1" dirty="0">
+                <a:solidFill>
+                  <a:srgbClr val="FFFFFF"/>
+                </a:solidFill>
+                <a:latin typeface="Arial" pitchFamily="34" charset="0"/>
+                <a:ea typeface="Arial" pitchFamily="34" charset="-122"/>
+                <a:cs typeface="Arial" pitchFamily="34" charset="-120"/>
+              </a:rPr>
+              <a:t>B</a:t>
+            </a:r>
+            <a:endParaRPr lang="en-US" sz="1800" dirty="0"/>
+          </a:p>
+        </p:txBody>
+      </p:sp>
+      <p:sp>
+        <p:nvSpPr>
+          <p:cNvPr id="11" name="Text 9"/>
+          <p:cNvSpPr/>
+          <p:nvPr/>
+        </p:nvSpPr>
+        <p:spPr>
+          <a:xfrm>
+            <a:off x="1554480" y="3246120"/>
+            <a:ext cx="9692640" cy="777240"/>
+          </a:xfrm>
+          <a:prstGeom prst="rect">
+            <a:avLst/>
+          </a:prstGeom>
+          <a:noFill/>
+          <a:ln/>
+        </p:spPr>
+        <p:txBody>
+          <a:bodyPr wrap="square" lIns="0" tIns="0" rIns="0" bIns="0" rtlCol="0" anchor="ctr"/>
+          <a:lstStyle/>
+          <a:p>
+            <a:pPr indent="0" marL="0">
+              <a:buNone/>
+            </a:pPr>
+            <a:r>
+              <a:rPr lang="en-US" sz="1300" dirty="0">
+                <a:solidFill>
+                  <a:srgbClr val="FFFFFF"/>
+                </a:solidFill>
+                <a:latin typeface="Arial" pitchFamily="34" charset="0"/>
+                <a:ea typeface="Arial" pitchFamily="34" charset="-122"/>
+                <a:cs typeface="Arial" pitchFamily="34" charset="-120"/>
+              </a:rPr>
+              <a:t>Dormant seeds always die, so wild plants make more seeds, but the farmer loses money</a:t>
+            </a:r>
+            <a:endParaRPr lang="en-US" sz="1300" dirty="0"/>
+          </a:p>
+        </p:txBody>
+      </p:sp>
+      <p:sp>
+        <p:nvSpPr>
+          <p:cNvPr id="12" name="Shape 10"/>
+          <p:cNvSpPr/>
+          <p:nvPr/>
+        </p:nvSpPr>
+        <p:spPr>
+          <a:xfrm>
+            <a:off x="731520" y="4160520"/>
+            <a:ext cx="10698480" cy="777240"/>
+          </a:xfrm>
+          <a:prstGeom prst="roundRect">
+            <a:avLst>
+              <a:gd name="adj" fmla="val 9412"/>
+            </a:avLst>
+          </a:prstGeom>
+          <a:solidFill>
+            <a:srgbClr val="7C5CAA"/>
+          </a:solidFill>
+          <a:ln/>
+        </p:spPr>
+      </p:sp>
+      <p:sp>
+        <p:nvSpPr>
+          <p:cNvPr id="13" name="Text 11"/>
+          <p:cNvSpPr/>
+          <p:nvPr/>
+        </p:nvSpPr>
+        <p:spPr>
+          <a:xfrm>
+            <a:off x="914400" y="4160520"/>
+            <a:ext cx="548640" cy="777240"/>
+          </a:xfrm>
+          <a:prstGeom prst="rect">
+            <a:avLst/>
+          </a:prstGeom>
+          <a:noFill/>
+          <a:ln/>
+        </p:spPr>
+        <p:txBody>
+          <a:bodyPr wrap="square" lIns="0" tIns="0" rIns="0" bIns="0" rtlCol="0" anchor="ctr"/>
+          <a:lstStyle/>
+          <a:p>
+            <a:pPr indent="0" marL="0">
+              <a:buNone/>
+            </a:pPr>
+            <a:r>
+              <a:rPr lang="en-US" sz="1800" b="1" dirty="0">
+                <a:solidFill>
+                  <a:srgbClr val="FFFFFF"/>
+                </a:solidFill>
+                <a:latin typeface="Arial" pitchFamily="34" charset="0"/>
+                <a:ea typeface="Arial" pitchFamily="34" charset="-122"/>
+                <a:cs typeface="Arial" pitchFamily="34" charset="-120"/>
+              </a:rPr>
+              <a:t>C</a:t>
+            </a:r>
+            <a:endParaRPr lang="en-US" sz="1800" dirty="0"/>
+          </a:p>
+        </p:txBody>
+      </p:sp>
+      <p:sp>
+        <p:nvSpPr>
+          <p:cNvPr id="14" name="Text 12"/>
+          <p:cNvSpPr/>
+          <p:nvPr/>
+        </p:nvSpPr>
+        <p:spPr>
+          <a:xfrm>
+            <a:off x="1554480" y="4160520"/>
+            <a:ext cx="9692640" cy="777240"/>
+          </a:xfrm>
+          <a:prstGeom prst="rect">
+            <a:avLst/>
+          </a:prstGeom>
+          <a:noFill/>
+          <a:ln/>
+        </p:spPr>
+        <p:txBody>
+          <a:bodyPr wrap="square" lIns="0" tIns="0" rIns="0" bIns="0" rtlCol="0" anchor="ctr"/>
+          <a:lstStyle/>
+          <a:p>
+            <a:pPr indent="0" marL="0">
+              <a:buNone/>
+            </a:pPr>
+            <a:r>
+              <a:rPr lang="en-US" sz="1300" dirty="0">
+                <a:solidFill>
+                  <a:srgbClr val="FFFFFF"/>
+                </a:solidFill>
+                <a:latin typeface="Arial" pitchFamily="34" charset="0"/>
+                <a:ea typeface="Arial" pitchFamily="34" charset="-122"/>
+                <a:cs typeface="Arial" pitchFamily="34" charset="-120"/>
+              </a:rPr>
+              <a:t>Dormancy stops pests from eating seeds in the wild but not in a farm</a:t>
+            </a:r>
+            <a:endParaRPr lang="en-US" sz="1300" dirty="0"/>
+          </a:p>
+        </p:txBody>
+      </p:sp>
+      <p:sp>
+        <p:nvSpPr>
+          <p:cNvPr id="15" name="Shape 13"/>
+          <p:cNvSpPr/>
+          <p:nvPr/>
+        </p:nvSpPr>
+        <p:spPr>
+          <a:xfrm>
+            <a:off x="731520" y="5074920"/>
+            <a:ext cx="10698480" cy="777240"/>
+          </a:xfrm>
+          <a:prstGeom prst="roundRect">
+            <a:avLst>
+              <a:gd name="adj" fmla="val 9412"/>
+            </a:avLst>
+          </a:prstGeom>
+          <a:solidFill>
+            <a:srgbClr val="7C5CAA"/>
+          </a:solidFill>
+          <a:ln/>
+        </p:spPr>
+      </p:sp>
+      <p:sp>
+        <p:nvSpPr>
+          <p:cNvPr id="16" name="Text 14"/>
+          <p:cNvSpPr/>
+          <p:nvPr/>
+        </p:nvSpPr>
+        <p:spPr>
+          <a:xfrm>
+            <a:off x="914400" y="5074920"/>
+            <a:ext cx="548640" cy="777240"/>
+          </a:xfrm>
+          <a:prstGeom prst="rect">
+            <a:avLst/>
+          </a:prstGeom>
+          <a:noFill/>
+          <a:ln/>
+        </p:spPr>
+        <p:txBody>
+          <a:bodyPr wrap="square" lIns="0" tIns="0" rIns="0" bIns="0" rtlCol="0" anchor="ctr"/>
+          <a:lstStyle/>
+          <a:p>
+            <a:pPr indent="0" marL="0">
+              <a:buNone/>
+            </a:pPr>
+            <a:r>
+              <a:rPr lang="en-US" sz="1800" b="1" dirty="0">
+                <a:solidFill>
+                  <a:srgbClr val="FFFFFF"/>
+                </a:solidFill>
+                <a:latin typeface="Arial" pitchFamily="34" charset="0"/>
+                <a:ea typeface="Arial" pitchFamily="34" charset="-122"/>
+                <a:cs typeface="Arial" pitchFamily="34" charset="-120"/>
+              </a:rPr>
+              <a:t>D</a:t>
+            </a:r>
+            <a:endParaRPr lang="en-US" sz="1800" dirty="0"/>
+          </a:p>
+        </p:txBody>
+      </p:sp>
+      <p:sp>
+        <p:nvSpPr>
+          <p:cNvPr id="17" name="Text 15"/>
+          <p:cNvSpPr/>
+          <p:nvPr/>
+        </p:nvSpPr>
+        <p:spPr>
+          <a:xfrm>
+            <a:off x="1554480" y="5074920"/>
+            <a:ext cx="9692640" cy="777240"/>
+          </a:xfrm>
+          <a:prstGeom prst="rect">
+            <a:avLst/>
+          </a:prstGeom>
+          <a:noFill/>
+          <a:ln/>
+        </p:spPr>
+        <p:txBody>
+          <a:bodyPr wrap="square" lIns="0" tIns="0" rIns="0" bIns="0" rtlCol="0" anchor="ctr"/>
+          <a:lstStyle/>
+          <a:p>
+            <a:pPr indent="0" marL="0">
+              <a:buNone/>
+            </a:pPr>
+            <a:r>
+              <a:rPr lang="en-US" sz="1300" dirty="0">
+                <a:solidFill>
+                  <a:srgbClr val="FFFFFF"/>
+                </a:solidFill>
+                <a:latin typeface="Arial" pitchFamily="34" charset="0"/>
+                <a:ea typeface="Arial" pitchFamily="34" charset="-122"/>
+                <a:cs typeface="Arial" pitchFamily="34" charset="-120"/>
+              </a:rPr>
+              <a:t>Dormancy makes seeds grow faster, which wild plants need but farmers do not</a:t>
+            </a:r>
+            <a:endParaRPr lang="en-US" sz="1300" dirty="0"/>
+          </a:p>
+        </p:txBody>
+      </p:sp>
+      <p:sp>
+        <p:nvSpPr>
+          <p:cNvPr id="18" name="Text 16"/>
+          <p:cNvSpPr/>
+          <p:nvPr/>
+        </p:nvSpPr>
+        <p:spPr>
+          <a:xfrm>
+            <a:off x="11521440" y="6446520"/>
+            <a:ext cx="457200" cy="274320"/>
+          </a:xfrm>
+          <a:prstGeom prst="rect">
+            <a:avLst/>
+          </a:prstGeom>
+          <a:noFill/>
+          <a:ln/>
+        </p:spPr>
+        <p:txBody>
+          <a:bodyPr wrap="square" lIns="0" tIns="0" rIns="0" bIns="0" rtlCol="0" anchor="ctr"/>
+          <a:lstStyle/>
+          <a:p>
+            <a:pPr algn="r" indent="0" marL="0">
+              <a:buNone/>
+            </a:pPr>
+            <a:r>
+              <a:rPr lang="en-US" sz="1000" dirty="0">
+                <a:solidFill>
+                  <a:srgbClr val="C9B8E0"/>
+                </a:solidFill>
+                <a:latin typeface="Arial" pitchFamily="34" charset="0"/>
+                <a:ea typeface="Arial" pitchFamily="34" charset="-122"/>
+                <a:cs typeface="Arial" pitchFamily="34" charset="-120"/>
+              </a:rPr>
+              <a:t>9</a:t>
+            </a:r>
+            <a:endParaRPr lang="en-US" sz="1000" dirty="0"/>
           </a:p>
         </p:txBody>
       </p:sp>
